--- a/controller/NNMEC/Readme4PythonNNMEC.pptx
+++ b/controller/NNMEC/Readme4PythonNNMEC.pptx
@@ -398,7 +398,7 @@
           <a:p>
             <a:fld id="{099CA03D-D818-4553-B191-DD3C8500F17A}" type="datetimeFigureOut">
               <a:rPr kumimoji="1" lang="ja-JP" altLang="en-US" smtClean="0"/>
-              <a:t>2026/7/21</a:t>
+              <a:t>2026/10/8</a:t>
             </a:fld>
             <a:endParaRPr kumimoji="1" lang="ja-JP" altLang="en-US"/>
           </a:p>
@@ -926,7 +926,7 @@
           <a:p>
             <a:fld id="{B90180CF-8FE2-456B-8A9F-257CCAE87B1F}" type="datetime1">
               <a:rPr kumimoji="1" lang="ja-JP" altLang="en-US" smtClean="0"/>
-              <a:t>2026/7/21</a:t>
+              <a:t>2026/10/8</a:t>
             </a:fld>
             <a:endParaRPr kumimoji="1" lang="ja-JP" altLang="en-US"/>
           </a:p>
@@ -1237,7 +1237,7 @@
           <a:p>
             <a:fld id="{B90180CF-8FE2-456B-8A9F-257CCAE87B1F}" type="datetime1">
               <a:rPr kumimoji="1" lang="ja-JP" altLang="en-US" smtClean="0"/>
-              <a:t>2026/7/21</a:t>
+              <a:t>2026/10/8</a:t>
             </a:fld>
             <a:endParaRPr kumimoji="1" lang="ja-JP" altLang="en-US"/>
           </a:p>
@@ -1448,7 +1448,7 @@
           <a:p>
             <a:fld id="{8F934565-9092-4BA3-AD6F-09DA969FA889}" type="datetime1">
               <a:rPr kumimoji="1" lang="ja-JP" altLang="en-US" smtClean="0"/>
-              <a:t>2026/7/21</a:t>
+              <a:t>2026/10/8</a:t>
             </a:fld>
             <a:endParaRPr kumimoji="1" lang="ja-JP" altLang="en-US"/>
           </a:p>
@@ -1725,7 +1725,7 @@
           <a:p>
             <a:fld id="{E1E178D6-BC13-4B05-B82A-3DE852BA502C}" type="datetime1">
               <a:rPr kumimoji="1" lang="ja-JP" altLang="en-US" smtClean="0"/>
-              <a:t>2026/7/21</a:t>
+              <a:t>2026/10/8</a:t>
             </a:fld>
             <a:endParaRPr kumimoji="1" lang="ja-JP" altLang="en-US"/>
           </a:p>
@@ -2004,7 +2004,7 @@
           <a:p>
             <a:fld id="{97938166-345B-4C39-A885-228CE7F191AD}" type="datetime1">
               <a:rPr kumimoji="1" lang="ja-JP" altLang="en-US" smtClean="0"/>
-              <a:t>2026/7/21</a:t>
+              <a:t>2026/10/8</a:t>
             </a:fld>
             <a:endParaRPr kumimoji="1" lang="ja-JP" altLang="en-US"/>
           </a:p>
@@ -2354,7 +2354,7 @@
           <a:p>
             <a:fld id="{944467EF-4991-49C1-86BC-1E5A4BAD4189}" type="datetime1">
               <a:rPr kumimoji="1" lang="ja-JP" altLang="en-US" smtClean="0"/>
-              <a:t>2026/7/21</a:t>
+              <a:t>2026/10/8</a:t>
             </a:fld>
             <a:endParaRPr kumimoji="1" lang="ja-JP" altLang="en-US"/>
           </a:p>
@@ -2529,7 +2529,7 @@
           <a:p>
             <a:fld id="{A46DD47A-5E9C-40BF-856A-F3D6BC3F42A9}" type="datetime1">
               <a:rPr kumimoji="1" lang="ja-JP" altLang="en-US" smtClean="0"/>
-              <a:t>2026/7/21</a:t>
+              <a:t>2026/10/8</a:t>
             </a:fld>
             <a:endParaRPr kumimoji="1" lang="ja-JP" altLang="en-US"/>
           </a:p>
@@ -2919,7 +2919,7 @@
           <a:p>
             <a:fld id="{98AFBE6B-A207-4511-9282-17E206542FA4}" type="datetime1">
               <a:rPr kumimoji="1" lang="ja-JP" altLang="en-US" smtClean="0"/>
-              <a:t>2026/7/21</a:t>
+              <a:t>2026/10/8</a:t>
             </a:fld>
             <a:endParaRPr kumimoji="1" lang="ja-JP" altLang="en-US"/>
           </a:p>
@@ -3301,7 +3301,7 @@
           <a:p>
             <a:fld id="{046030FB-E407-42DE-AAC3-5F48383F7959}" type="datetime1">
               <a:rPr kumimoji="1" lang="ja-JP" altLang="en-US" smtClean="0"/>
-              <a:t>2026/7/21</a:t>
+              <a:t>2026/10/8</a:t>
             </a:fld>
             <a:endParaRPr kumimoji="1" lang="ja-JP" altLang="en-US"/>
           </a:p>
@@ -3624,7 +3624,7 @@
           <a:p>
             <a:fld id="{DF4D11EB-66CE-487B-8E53-0D1CDFF8FB98}" type="datetime1">
               <a:rPr lang="ja-JP" altLang="en-US" smtClean="0"/>
-              <a:t>2026/7/21</a:t>
+              <a:t>2026/10/8</a:t>
             </a:fld>
             <a:endParaRPr lang="ja-JP" altLang="en-US"/>
           </a:p>
@@ -4482,7 +4482,7 @@
           <a:p>
             <a:fld id="{8F934565-9092-4BA3-AD6F-09DA969FA889}" type="datetime1">
               <a:rPr kumimoji="1" lang="ja-JP" altLang="en-US" smtClean="0"/>
-              <a:t>2026/7/21</a:t>
+              <a:t>2026/10/8</a:t>
             </a:fld>
             <a:endParaRPr kumimoji="1" lang="ja-JP" altLang="en-US"/>
           </a:p>
@@ -5347,7 +5347,7 @@
           <a:p>
             <a:fld id="{8F934565-9092-4BA3-AD6F-09DA969FA889}" type="datetime1">
               <a:rPr kumimoji="1" lang="ja-JP" altLang="en-US" smtClean="0"/>
-              <a:t>2026/7/21</a:t>
+              <a:t>2026/10/8</a:t>
             </a:fld>
             <a:endParaRPr kumimoji="1" lang="ja-JP" altLang="en-US"/>
           </a:p>
@@ -6486,7 +6486,7 @@
           <a:p>
             <a:fld id="{8F934565-9092-4BA3-AD6F-09DA969FA889}" type="datetime1">
               <a:rPr kumimoji="1" lang="ja-JP" altLang="en-US" smtClean="0"/>
-              <a:t>2026/7/21</a:t>
+              <a:t>2026/10/8</a:t>
             </a:fld>
             <a:endParaRPr kumimoji="1" lang="ja-JP" altLang="en-US"/>
           </a:p>
@@ -7846,7 +7846,7 @@
           <a:p>
             <a:fld id="{8F934565-9092-4BA3-AD6F-09DA969FA889}" type="datetime1">
               <a:rPr kumimoji="1" lang="ja-JP" altLang="en-US" smtClean="0"/>
-              <a:t>2026/7/21</a:t>
+              <a:t>2026/10/8</a:t>
             </a:fld>
             <a:endParaRPr kumimoji="1" lang="ja-JP" altLang="en-US"/>
           </a:p>
@@ -8529,15 +8529,6 @@
 </file>
 
 <file path=customXml/item2.xml><?xml version="1.0" encoding="utf-8"?>
-<?mso-contentType ?>
-<FormTemplates xmlns="http://schemas.microsoft.com/sharepoint/v3/contenttype/forms">
-  <Display>DocumentLibraryForm</Display>
-  <Edit>DocumentLibraryForm</Edit>
-  <New>DocumentLibraryForm</New>
-</FormTemplates>
-</file>
-
-<file path=customXml/item3.xml><?xml version="1.0" encoding="utf-8"?>
 <ct:contentTypeSchema xmlns:ct="http://schemas.microsoft.com/office/2006/metadata/contentType" xmlns:ma="http://schemas.microsoft.com/office/2006/metadata/properties/metaAttributes" ct:_="" ma:_="" ma:contentTypeName="ドキュメント" ma:contentTypeID="0x010100F0BF34DA9A9AB14A9F7AC31FBE37F9E5" ma:contentTypeVersion="16" ma:contentTypeDescription="新しいドキュメントを作成します。" ma:contentTypeScope="" ma:versionID="32dd7207e8140c2c126537d3c2fd37c5">
   <xsd:schema xmlns:xsd="http://www.w3.org/2001/XMLSchema" xmlns:xs="http://www.w3.org/2001/XMLSchema" xmlns:p="http://schemas.microsoft.com/office/2006/metadata/properties" xmlns:ns2="7423ae4f-c4e8-48bd-a156-3a6ed64ee840" xmlns:ns3="2fc92963-ec3a-4730-8ea3-7221b6caf362" targetNamespace="http://schemas.microsoft.com/office/2006/metadata/properties" ma:root="true" ma:fieldsID="f3879058c32170438aed5fb3d384d5ad" ns2:_="" ns3:_="">
     <xsd:import namespace="7423ae4f-c4e8-48bd-a156-3a6ed64ee840"/>
@@ -8778,6 +8769,15 @@
 </ct:contentTypeSchema>
 </file>
 
+<file path=customXml/item3.xml><?xml version="1.0" encoding="utf-8"?>
+<?mso-contentType ?>
+<FormTemplates xmlns="http://schemas.microsoft.com/sharepoint/v3/contenttype/forms">
+  <Display>DocumentLibraryForm</Display>
+  <Edit>DocumentLibraryForm</Edit>
+  <New>DocumentLibraryForm</New>
+</FormTemplates>
+</file>
+
 <file path=customXml/itemProps1.xml><?xml version="1.0" encoding="utf-8"?>
 <ds:datastoreItem xmlns:ds="http://schemas.openxmlformats.org/officeDocument/2006/customXml" ds:itemID="{F6D09FDB-9868-44A6-A96C-0C66C7078369}">
   <ds:schemaRefs>
@@ -8796,14 +8796,6 @@
 </file>
 
 <file path=customXml/itemProps2.xml><?xml version="1.0" encoding="utf-8"?>
-<ds:datastoreItem xmlns:ds="http://schemas.openxmlformats.org/officeDocument/2006/customXml" ds:itemID="{DBF5F6B8-8CA8-42FC-ABA9-1599493B6861}">
-  <ds:schemaRefs>
-    <ds:schemaRef ds:uri="http://schemas.microsoft.com/sharepoint/v3/contenttype/forms"/>
-  </ds:schemaRefs>
-</ds:datastoreItem>
-</file>
-
-<file path=customXml/itemProps3.xml><?xml version="1.0" encoding="utf-8"?>
 <ds:datastoreItem xmlns:ds="http://schemas.openxmlformats.org/officeDocument/2006/customXml" ds:itemID="{9234AE58-1F37-44BE-8BCC-BD47CBB6D0E8}">
   <ds:schemaRefs>
     <ds:schemaRef ds:uri="http://schemas.microsoft.com/office/2006/metadata/contentType"/>
@@ -8822,6 +8814,14 @@
 </ds:datastoreItem>
 </file>
 
+<file path=customXml/itemProps3.xml><?xml version="1.0" encoding="utf-8"?>
+<ds:datastoreItem xmlns:ds="http://schemas.openxmlformats.org/officeDocument/2006/customXml" ds:itemID="{DBF5F6B8-8CA8-42FC-ABA9-1599493B6861}">
+  <ds:schemaRefs>
+    <ds:schemaRef ds:uri="http://schemas.microsoft.com/sharepoint/v3/contenttype/forms"/>
+  </ds:schemaRefs>
+</ds:datastoreItem>
+</file>
+
 <file path=docMetadata/LabelInfo.xml><?xml version="1.0" encoding="utf-8"?>
 <clbl:labelList xmlns:clbl="http://schemas.microsoft.com/office/2020/mipLabelMetadata">
   <clbl:label id="{46ec3f30-2d4f-4250-82e1-372410d23208}" enabled="0" method="" siteId="{46ec3f30-2d4f-4250-82e1-372410d23208}" removed="1"/>
